--- a/12/answers/Class12_rp17-7A_02.pptx
+++ b/12/answers/Class12_rp17-7A_02.pptx
@@ -2,16 +2,16 @@
 <file path=ppt/presentation.xml><?xml version="1.0" encoding="utf-8"?>
 <p:presentation xmlns:p="http://schemas.openxmlformats.org/presentationml/2006/main">
   <p:sldMasterIdLst>
-    <p:sldMasterId xmlns:r="http://schemas.openxmlformats.org/officeDocument/2006/relationships" id="2147483648" r:id="R7ea089d5dce943e9"/>
+    <p:sldMasterId xmlns:r="http://schemas.openxmlformats.org/officeDocument/2006/relationships" id="2147483648" r:id="R4d84f746059a467b"/>
   </p:sldMasterIdLst>
   <p:notesMasterIdLst>
-    <p:notesMasterId xmlns:r="http://schemas.openxmlformats.org/officeDocument/2006/relationships" r:id="Rb93f3aa532c54871"/>
+    <p:notesMasterId xmlns:r="http://schemas.openxmlformats.org/officeDocument/2006/relationships" r:id="R2747b277397e49f9"/>
   </p:notesMasterIdLst>
   <p:sldIdLst>
-    <p:sldId xmlns:r="http://schemas.openxmlformats.org/officeDocument/2006/relationships" id="256" r:id="Rd72ee919d0c447c4"/>
-    <p:sldId xmlns:r="http://schemas.openxmlformats.org/officeDocument/2006/relationships" id="257" r:id="R6f7f8269d57f41f3"/>
-    <p:sldId xmlns:r="http://schemas.openxmlformats.org/officeDocument/2006/relationships" id="258" r:id="R8db387c0c9084191"/>
-    <p:sldId xmlns:r="http://schemas.openxmlformats.org/officeDocument/2006/relationships" id="259" r:id="Rd11c3ed64b474880"/>
+    <p:sldId xmlns:r="http://schemas.openxmlformats.org/officeDocument/2006/relationships" id="256" r:id="Re770e06f9f9d4426"/>
+    <p:sldId xmlns:r="http://schemas.openxmlformats.org/officeDocument/2006/relationships" id="257" r:id="R272cc987487c44cf"/>
+    <p:sldId xmlns:r="http://schemas.openxmlformats.org/officeDocument/2006/relationships" id="258" r:id="R4f46c14057a84f0a"/>
+    <p:sldId xmlns:r="http://schemas.openxmlformats.org/officeDocument/2006/relationships" id="259" r:id="R312ccce8379e47bf"/>
   </p:sldIdLst>
   <p:sldSz cx="12192000" cy="6858000"/>
   <p:notesSz cx="6858000" cy="9144000"/>
@@ -802,7 +802,7 @@
   </p:cSld>
   <p:clrMap bg1="lt1" tx1="dk1" bg2="lt2" tx2="dk2" accent1="accent1" accent2="accent2" accent3="accent3" accent4="accent4" accent5="accent5" accent6="accent6" hlink="hlink" folHlink="folHlink"/>
   <p:sldLayoutIdLst>
-    <p:sldLayoutId xmlns:r="http://schemas.openxmlformats.org/officeDocument/2006/relationships" id="2147483649" r:id="R2f13859f52ba4e21"/>
+    <p:sldLayoutId xmlns:r="http://schemas.openxmlformats.org/officeDocument/2006/relationships" id="2147483649" r:id="R6811c56dbcbe4a44"/>
   </p:sldLayoutIdLst>
   <p:txStyles>
     <p:titleStyle>
@@ -1353,7 +1353,7 @@
           <p:cNvPr id="1" name="">
             <a:extLst xmlns:a="http://schemas.openxmlformats.org/drawingml/2006/main">
               <a:ext uri="{FF2B5EF4-FFF2-40B4-BE49-F238E27FC236}">
-                <a16:creationId xmlns:a16="http://schemas.microsoft.com/office/drawing/2014/main" id="{FE7ED341-7FB0-437A-BFDE-71C6591374AE}"/>
+                <a16:creationId xmlns:a16="http://schemas.microsoft.com/office/drawing/2014/main" id="{E34CEE15-89F6-4885-B435-CF435327F552}"/>
               </a:ext>
             </a:extLst>
           </p:cNvPr>
@@ -1403,7 +1403,7 @@
           <p:cNvPr id="2" name="">
             <a:extLst xmlns:a="http://schemas.openxmlformats.org/drawingml/2006/main">
               <a:ext uri="{FF2B5EF4-FFF2-40B4-BE49-F238E27FC236}">
-                <a16:creationId xmlns:a16="http://schemas.microsoft.com/office/drawing/2014/main" id="{0208E7B3-C6FD-403F-9156-DF584AAD102F}"/>
+                <a16:creationId xmlns:a16="http://schemas.microsoft.com/office/drawing/2014/main" id="{592F8FF9-D32A-4577-BCF8-F79E8A46914C}"/>
               </a:ext>
             </a:extLst>
           </p:cNvPr>
@@ -1453,7 +1453,7 @@
           <p:cNvPr id="3" name="">
             <a:extLst xmlns:a="http://schemas.openxmlformats.org/drawingml/2006/main">
               <a:ext uri="{FF2B5EF4-FFF2-40B4-BE49-F238E27FC236}">
-                <a16:creationId xmlns:a16="http://schemas.microsoft.com/office/drawing/2014/main" id="{B1EF1447-F50A-4CAF-A54B-7E9C8C0F9A23}"/>
+                <a16:creationId xmlns:a16="http://schemas.microsoft.com/office/drawing/2014/main" id="{AC0496D8-BBC8-45A1-B646-5E6DFA32323F}"/>
               </a:ext>
             </a:extLst>
           </p:cNvPr>
@@ -1488,7 +1488,7 @@
           <p:cNvPr id="4" name="">
             <a:extLst xmlns:a="http://schemas.openxmlformats.org/drawingml/2006/main">
               <a:ext uri="{FF2B5EF4-FFF2-40B4-BE49-F238E27FC236}">
-                <a16:creationId xmlns:a16="http://schemas.microsoft.com/office/drawing/2014/main" id="{F4C9322C-BF80-451E-978D-6F23D86D609F}"/>
+                <a16:creationId xmlns:a16="http://schemas.microsoft.com/office/drawing/2014/main" id="{A6FB557E-F3E8-47BA-ADAB-D36FEF73324D}"/>
               </a:ext>
             </a:extLst>
           </p:cNvPr>
@@ -1521,7 +1521,7 @@
           <p:cNvPr id="5" name="">
             <a:extLst xmlns:a="http://schemas.openxmlformats.org/drawingml/2006/main">
               <a:ext uri="{FF2B5EF4-FFF2-40B4-BE49-F238E27FC236}">
-                <a16:creationId xmlns:a16="http://schemas.microsoft.com/office/drawing/2014/main" id="{BABAFF96-45BA-4B99-AD3C-49B04BDB5AB6}"/>
+                <a16:creationId xmlns:a16="http://schemas.microsoft.com/office/drawing/2014/main" id="{B4F5CA75-E105-4C21-9171-7921891A49F0}"/>
               </a:ext>
             </a:extLst>
           </p:cNvPr>
@@ -1571,7 +1571,7 @@
           <p:cNvPr id="6" name="">
             <a:extLst xmlns:a="http://schemas.openxmlformats.org/drawingml/2006/main">
               <a:ext uri="{FF2B5EF4-FFF2-40B4-BE49-F238E27FC236}">
-                <a16:creationId xmlns:a16="http://schemas.microsoft.com/office/drawing/2014/main" id="{421AE9CB-3E49-4A9C-BDD4-611A958D4235}"/>
+                <a16:creationId xmlns:a16="http://schemas.microsoft.com/office/drawing/2014/main" id="{4C06EF6C-6715-437C-B84A-42E160191856}"/>
               </a:ext>
             </a:extLst>
           </p:cNvPr>
@@ -1621,7 +1621,7 @@
           <p:cNvPr id="7" name="">
             <a:extLst xmlns:a="http://schemas.openxmlformats.org/drawingml/2006/main">
               <a:ext uri="{FF2B5EF4-FFF2-40B4-BE49-F238E27FC236}">
-                <a16:creationId xmlns:a16="http://schemas.microsoft.com/office/drawing/2014/main" id="{BBDCFA34-A9CD-4FA3-BC27-F611B57ADEA2}"/>
+                <a16:creationId xmlns:a16="http://schemas.microsoft.com/office/drawing/2014/main" id="{7FE54E05-EDF3-4A1D-AEB0-E99B9163D2E0}"/>
               </a:ext>
             </a:extLst>
           </p:cNvPr>
@@ -1656,7 +1656,7 @@
           <p:cNvPr id="8" name="">
             <a:extLst xmlns:a="http://schemas.openxmlformats.org/drawingml/2006/main">
               <a:ext uri="{FF2B5EF4-FFF2-40B4-BE49-F238E27FC236}">
-                <a16:creationId xmlns:a16="http://schemas.microsoft.com/office/drawing/2014/main" id="{979F1A47-21E5-417A-90D2-34986098A206}"/>
+                <a16:creationId xmlns:a16="http://schemas.microsoft.com/office/drawing/2014/main" id="{37EE7C01-83B6-4B4A-A898-88467D90B66B}"/>
               </a:ext>
             </a:extLst>
           </p:cNvPr>
@@ -1689,7 +1689,7 @@
           <p:cNvPr id="9" name="">
             <a:extLst xmlns:a="http://schemas.openxmlformats.org/drawingml/2006/main">
               <a:ext uri="{FF2B5EF4-FFF2-40B4-BE49-F238E27FC236}">
-                <a16:creationId xmlns:a16="http://schemas.microsoft.com/office/drawing/2014/main" id="{D455E82D-C646-47AE-B80F-1AFB1015D0CC}"/>
+                <a16:creationId xmlns:a16="http://schemas.microsoft.com/office/drawing/2014/main" id="{D56A1154-214B-40EC-A6FB-BC3B279B8452}"/>
               </a:ext>
             </a:extLst>
           </p:cNvPr>
@@ -1739,7 +1739,7 @@
           <p:cNvPr id="10" name="">
             <a:extLst xmlns:a="http://schemas.openxmlformats.org/drawingml/2006/main">
               <a:ext uri="{FF2B5EF4-FFF2-40B4-BE49-F238E27FC236}">
-                <a16:creationId xmlns:a16="http://schemas.microsoft.com/office/drawing/2014/main" id="{BC7EEC20-CA39-404F-8891-E2277A367E60}"/>
+                <a16:creationId xmlns:a16="http://schemas.microsoft.com/office/drawing/2014/main" id="{1C89C290-207C-47C2-9CE2-F52172FF8B96}"/>
               </a:ext>
             </a:extLst>
           </p:cNvPr>
@@ -1789,7 +1789,7 @@
           <p:cNvPr id="11" name="">
             <a:extLst xmlns:a="http://schemas.openxmlformats.org/drawingml/2006/main">
               <a:ext uri="{FF2B5EF4-FFF2-40B4-BE49-F238E27FC236}">
-                <a16:creationId xmlns:a16="http://schemas.microsoft.com/office/drawing/2014/main" id="{CA73D116-E912-4368-8E64-4EC89ED7E47C}"/>
+                <a16:creationId xmlns:a16="http://schemas.microsoft.com/office/drawing/2014/main" id="{AA270C3E-01AE-41D9-81E0-0F3568D243BE}"/>
               </a:ext>
             </a:extLst>
           </p:cNvPr>
@@ -1824,7 +1824,7 @@
           <p:cNvPr id="12" name="">
             <a:extLst xmlns:a="http://schemas.openxmlformats.org/drawingml/2006/main">
               <a:ext uri="{FF2B5EF4-FFF2-40B4-BE49-F238E27FC236}">
-                <a16:creationId xmlns:a16="http://schemas.microsoft.com/office/drawing/2014/main" id="{0433E7BD-6DE7-467B-8B92-E943F6C4FB54}"/>
+                <a16:creationId xmlns:a16="http://schemas.microsoft.com/office/drawing/2014/main" id="{AEAFBAEC-79C8-4BF7-AC3C-62A317B995ED}"/>
               </a:ext>
             </a:extLst>
           </p:cNvPr>
@@ -1857,7 +1857,7 @@
           <p:cNvPr id="13" name="">
             <a:extLst xmlns:a="http://schemas.openxmlformats.org/drawingml/2006/main">
               <a:ext uri="{FF2B5EF4-FFF2-40B4-BE49-F238E27FC236}">
-                <a16:creationId xmlns:a16="http://schemas.microsoft.com/office/drawing/2014/main" id="{ECC553D3-8E08-47FD-A297-83C6D27E61C7}"/>
+                <a16:creationId xmlns:a16="http://schemas.microsoft.com/office/drawing/2014/main" id="{0049FE97-32A9-4AA5-A416-470275C7BA59}"/>
               </a:ext>
             </a:extLst>
           </p:cNvPr>
@@ -1907,7 +1907,7 @@
           <p:cNvPr id="14" name="">
             <a:extLst xmlns:a="http://schemas.openxmlformats.org/drawingml/2006/main">
               <a:ext uri="{FF2B5EF4-FFF2-40B4-BE49-F238E27FC236}">
-                <a16:creationId xmlns:a16="http://schemas.microsoft.com/office/drawing/2014/main" id="{75A54315-0DBF-4368-9C17-D60E98E02C48}"/>
+                <a16:creationId xmlns:a16="http://schemas.microsoft.com/office/drawing/2014/main" id="{829ACA28-81E3-4CC9-9B86-7E70362F48D3}"/>
               </a:ext>
             </a:extLst>
           </p:cNvPr>
@@ -1957,7 +1957,7 @@
           <p:cNvPr id="15" name="">
             <a:extLst xmlns:a="http://schemas.openxmlformats.org/drawingml/2006/main">
               <a:ext uri="{FF2B5EF4-FFF2-40B4-BE49-F238E27FC236}">
-                <a16:creationId xmlns:a16="http://schemas.microsoft.com/office/drawing/2014/main" id="{C671D874-8650-48E0-AFF1-EDF13637AE07}"/>
+                <a16:creationId xmlns:a16="http://schemas.microsoft.com/office/drawing/2014/main" id="{25C76668-00D9-43AB-8CA8-8E8A107CBC91}"/>
               </a:ext>
             </a:extLst>
           </p:cNvPr>
@@ -2045,7 +2045,7 @@
           <p:nvPr/>
         </p:nvPicPr>
         <p:blipFill>
-          <a:blip xmlns:r="http://schemas.openxmlformats.org/officeDocument/2006/relationships" xmlns:a="http://schemas.openxmlformats.org/drawingml/2006/main" r:embed="Rb2a76a8405164fd8"/>
+          <a:blip xmlns:r="http://schemas.openxmlformats.org/officeDocument/2006/relationships" xmlns:a="http://schemas.openxmlformats.org/drawingml/2006/main" r:embed="R57b99762818a42b0"/>
           <a:stretch xmlns:a="http://schemas.openxmlformats.org/drawingml/2006/main"/>
         </p:blipFill>
         <p:spPr>
@@ -2063,7 +2063,7 @@
           <p:cNvPr id="17" name="">
             <a:extLst xmlns:a="http://schemas.openxmlformats.org/drawingml/2006/main">
               <a:ext uri="{FF2B5EF4-FFF2-40B4-BE49-F238E27FC236}">
-                <a16:creationId xmlns:a16="http://schemas.microsoft.com/office/drawing/2014/main" id="{9A2CA113-15B4-4B8B-8177-38901863A443}"/>
+                <a16:creationId xmlns:a16="http://schemas.microsoft.com/office/drawing/2014/main" id="{84B96FA0-8D94-453C-A462-D87D0D27E71F}"/>
               </a:ext>
             </a:extLst>
           </p:cNvPr>
@@ -2111,7 +2111,7 @@
     </p:spTree>
     <p:extLst>
       <p:ext uri="{BB962C8B-B14F-4D97-AF65-F5344CB8AC3E}">
-        <p14:creationId xmlns:p14="http://schemas.microsoft.com/office/powerpoint/2010/main" val="62825773"/>
+        <p14:creationId xmlns:p14="http://schemas.microsoft.com/office/powerpoint/2010/main" val="999981303"/>
       </p:ext>
     </p:extLst>
   </p:cSld>
@@ -2142,7 +2142,7 @@
           <p:cNvPr id="1" name="">
             <a:extLst xmlns:a="http://schemas.openxmlformats.org/drawingml/2006/main">
               <a:ext uri="{FF2B5EF4-FFF2-40B4-BE49-F238E27FC236}">
-                <a16:creationId xmlns:a16="http://schemas.microsoft.com/office/drawing/2014/main" id="{6795EC66-77FE-45DC-8118-5B550ED38C6E}"/>
+                <a16:creationId xmlns:a16="http://schemas.microsoft.com/office/drawing/2014/main" id="{AAEDF770-BD3E-417F-8C75-C88E17301FC8}"/>
               </a:ext>
             </a:extLst>
           </p:cNvPr>
@@ -2192,7 +2192,7 @@
           <p:cNvPr id="2" name="">
             <a:extLst xmlns:a="http://schemas.openxmlformats.org/drawingml/2006/main">
               <a:ext uri="{FF2B5EF4-FFF2-40B4-BE49-F238E27FC236}">
-                <a16:creationId xmlns:a16="http://schemas.microsoft.com/office/drawing/2014/main" id="{EF251C1D-FB58-479A-A708-8203BDF8029F}"/>
+                <a16:creationId xmlns:a16="http://schemas.microsoft.com/office/drawing/2014/main" id="{64502D54-CDD6-4F8B-BD82-03AA37BE44B8}"/>
               </a:ext>
             </a:extLst>
           </p:cNvPr>
@@ -2920,7 +2920,7 @@
           <p:nvPr/>
         </p:nvPicPr>
         <p:blipFill>
-          <a:blip xmlns:r="http://schemas.openxmlformats.org/officeDocument/2006/relationships" xmlns:a="http://schemas.openxmlformats.org/drawingml/2006/main" r:embed="Rfa6cdc36cc2c4940"/>
+          <a:blip xmlns:r="http://schemas.openxmlformats.org/officeDocument/2006/relationships" xmlns:a="http://schemas.openxmlformats.org/drawingml/2006/main" r:embed="R6599aa9686344b9f"/>
           <a:stretch xmlns:a="http://schemas.openxmlformats.org/drawingml/2006/main"/>
         </p:blipFill>
         <p:spPr>
@@ -2938,7 +2938,7 @@
           <p:cNvPr id="5" name="">
             <a:extLst xmlns:a="http://schemas.openxmlformats.org/drawingml/2006/main">
               <a:ext uri="{FF2B5EF4-FFF2-40B4-BE49-F238E27FC236}">
-                <a16:creationId xmlns:a16="http://schemas.microsoft.com/office/drawing/2014/main" id="{0665B59B-B755-4D78-B345-B80E4C2AF794}"/>
+                <a16:creationId xmlns:a16="http://schemas.microsoft.com/office/drawing/2014/main" id="{CD61EA8F-3568-46BB-BC4A-7DBDCC8E78DA}"/>
               </a:ext>
             </a:extLst>
           </p:cNvPr>
@@ -3005,7 +3005,7 @@
           <p:cNvPr id="6" name="">
             <a:extLst xmlns:a="http://schemas.openxmlformats.org/drawingml/2006/main">
               <a:ext uri="{FF2B5EF4-FFF2-40B4-BE49-F238E27FC236}">
-                <a16:creationId xmlns:a16="http://schemas.microsoft.com/office/drawing/2014/main" id="{151466DB-59C1-41EF-A3C7-3C8B2CEE1169}"/>
+                <a16:creationId xmlns:a16="http://schemas.microsoft.com/office/drawing/2014/main" id="{774AD6B5-1A3D-4FB5-B094-092A59B8C8D3}"/>
               </a:ext>
             </a:extLst>
           </p:cNvPr>
@@ -3053,7 +3053,7 @@
     </p:spTree>
     <p:extLst>
       <p:ext uri="{BB962C8B-B14F-4D97-AF65-F5344CB8AC3E}">
-        <p14:creationId xmlns:p14="http://schemas.microsoft.com/office/powerpoint/2010/main" val="532342673"/>
+        <p14:creationId xmlns:p14="http://schemas.microsoft.com/office/powerpoint/2010/main" val="381642752"/>
       </p:ext>
     </p:extLst>
   </p:cSld>
@@ -3084,7 +3084,7 @@
           <p:cNvPr id="1" name="">
             <a:extLst xmlns:a="http://schemas.openxmlformats.org/drawingml/2006/main">
               <a:ext uri="{FF2B5EF4-FFF2-40B4-BE49-F238E27FC236}">
-                <a16:creationId xmlns:a16="http://schemas.microsoft.com/office/drawing/2014/main" id="{B3AA9EA4-119C-4AB3-AD8B-557DB432BB59}"/>
+                <a16:creationId xmlns:a16="http://schemas.microsoft.com/office/drawing/2014/main" id="{74273564-1035-4728-9DCA-98B644B1D74F}"/>
               </a:ext>
             </a:extLst>
           </p:cNvPr>
@@ -3134,7 +3134,7 @@
           <p:cNvPr id="2" name="">
             <a:extLst xmlns:a="http://schemas.openxmlformats.org/drawingml/2006/main">
               <a:ext uri="{FF2B5EF4-FFF2-40B4-BE49-F238E27FC236}">
-                <a16:creationId xmlns:a16="http://schemas.microsoft.com/office/drawing/2014/main" id="{392C7505-CF65-422E-8823-D3CAC21A3DBC}"/>
+                <a16:creationId xmlns:a16="http://schemas.microsoft.com/office/drawing/2014/main" id="{F5767284-26EC-4827-B356-76F6F43843C5}"/>
               </a:ext>
             </a:extLst>
           </p:cNvPr>
@@ -3188,7 +3188,7 @@
           <p:nvPr/>
         </p:nvPicPr>
         <p:blipFill>
-          <a:blip xmlns:r="http://schemas.openxmlformats.org/officeDocument/2006/relationships" xmlns:a="http://schemas.openxmlformats.org/drawingml/2006/main" r:embed="R465c5b6152e84972"/>
+          <a:blip xmlns:r="http://schemas.openxmlformats.org/officeDocument/2006/relationships" xmlns:a="http://schemas.openxmlformats.org/drawingml/2006/main" r:embed="R0b71e013f0224f31"/>
           <a:stretch xmlns:a="http://schemas.openxmlformats.org/drawingml/2006/main"/>
         </p:blipFill>
         <p:spPr>
@@ -3210,7 +3210,7 @@
           <p:nvPr/>
         </p:nvPicPr>
         <p:blipFill>
-          <a:blip xmlns:r="http://schemas.openxmlformats.org/officeDocument/2006/relationships" xmlns:a="http://schemas.openxmlformats.org/drawingml/2006/main" r:embed="R611daf3c2dab4a49"/>
+          <a:blip xmlns:r="http://schemas.openxmlformats.org/officeDocument/2006/relationships" xmlns:a="http://schemas.openxmlformats.org/drawingml/2006/main" r:embed="Re6e6b41784004d70"/>
           <a:stretch xmlns:a="http://schemas.openxmlformats.org/drawingml/2006/main"/>
         </p:blipFill>
         <p:spPr>
@@ -3228,7 +3228,7 @@
           <p:cNvPr id="5" name="">
             <a:extLst xmlns:a="http://schemas.openxmlformats.org/drawingml/2006/main">
               <a:ext uri="{FF2B5EF4-FFF2-40B4-BE49-F238E27FC236}">
-                <a16:creationId xmlns:a16="http://schemas.microsoft.com/office/drawing/2014/main" id="{4B087591-73A5-4035-9221-6D56FCD16794}"/>
+                <a16:creationId xmlns:a16="http://schemas.microsoft.com/office/drawing/2014/main" id="{208BC520-32B1-41D7-AC9E-C0BFBE300E13}"/>
               </a:ext>
             </a:extLst>
           </p:cNvPr>
@@ -3278,7 +3278,7 @@
           <p:cNvPr id="6" name="">
             <a:extLst xmlns:a="http://schemas.openxmlformats.org/drawingml/2006/main">
               <a:ext uri="{FF2B5EF4-FFF2-40B4-BE49-F238E27FC236}">
-                <a16:creationId xmlns:a16="http://schemas.microsoft.com/office/drawing/2014/main" id="{EDA07C10-648A-454E-9B8A-B34697B9B7C5}"/>
+                <a16:creationId xmlns:a16="http://schemas.microsoft.com/office/drawing/2014/main" id="{54402B7F-FCE2-4DE7-A3FB-1E28238F8A58}"/>
               </a:ext>
             </a:extLst>
           </p:cNvPr>
@@ -3326,7 +3326,7 @@
     </p:spTree>
     <p:extLst>
       <p:ext uri="{BB962C8B-B14F-4D97-AF65-F5344CB8AC3E}">
-        <p14:creationId xmlns:p14="http://schemas.microsoft.com/office/powerpoint/2010/main" val="2070146509"/>
+        <p14:creationId xmlns:p14="http://schemas.microsoft.com/office/powerpoint/2010/main" val="256190532"/>
       </p:ext>
     </p:extLst>
   </p:cSld>
@@ -3357,7 +3357,7 @@
           <p:cNvPr id="1" name="">
             <a:extLst xmlns:a="http://schemas.openxmlformats.org/drawingml/2006/main">
               <a:ext uri="{FF2B5EF4-FFF2-40B4-BE49-F238E27FC236}">
-                <a16:creationId xmlns:a16="http://schemas.microsoft.com/office/drawing/2014/main" id="{AC8BD0CD-7B19-487D-94DB-EA783CA72E35}"/>
+                <a16:creationId xmlns:a16="http://schemas.microsoft.com/office/drawing/2014/main" id="{A7A02F79-4244-473B-A722-04C37E1EC0D0}"/>
               </a:ext>
             </a:extLst>
           </p:cNvPr>
@@ -3407,7 +3407,7 @@
           <p:cNvPr id="2" name="">
             <a:extLst xmlns:a="http://schemas.openxmlformats.org/drawingml/2006/main">
               <a:ext uri="{FF2B5EF4-FFF2-40B4-BE49-F238E27FC236}">
-                <a16:creationId xmlns:a16="http://schemas.microsoft.com/office/drawing/2014/main" id="{87CB9320-D7C7-4C6E-AADB-32D982F11E7F}"/>
+                <a16:creationId xmlns:a16="http://schemas.microsoft.com/office/drawing/2014/main" id="{1FD460FC-B2C1-4CF2-847F-26142632A31D}"/>
               </a:ext>
             </a:extLst>
           </p:cNvPr>
@@ -3457,7 +3457,7 @@
           <p:cNvPr id="3" name="">
             <a:extLst xmlns:a="http://schemas.openxmlformats.org/drawingml/2006/main">
               <a:ext uri="{FF2B5EF4-FFF2-40B4-BE49-F238E27FC236}">
-                <a16:creationId xmlns:a16="http://schemas.microsoft.com/office/drawing/2014/main" id="{61A80F2E-6DF9-4952-B852-36364B06B50B}"/>
+                <a16:creationId xmlns:a16="http://schemas.microsoft.com/office/drawing/2014/main" id="{0C8C26D8-4D69-4D0E-8079-4D33441AF304}"/>
               </a:ext>
             </a:extLst>
           </p:cNvPr>
@@ -3497,7 +3497,7 @@
                   <a:srgbClr val="1C2A32"/>
                 </a:solidFill>
               </a:rPr>
-              <a:t>・採用優先候補は受験者2。総合力が高く、科目間の偏りも小さい。</a:t>
+              <a:t>・採用優先順位は、総合力を重視すると 2 → 4 → 3 → 1 → 5 と考えられる。</a:t>
             </a:r>
           </a:p>
           <a:p xmlns:a="http://schemas.openxmlformats.org/drawingml/2006/main">
@@ -3514,7 +3514,7 @@
                   <a:srgbClr val="1C2A32"/>
                 </a:solidFill>
               </a:rPr>
-              <a:t>・専門性や論述力を重視する職種では受験者1も候補になる。</a:t>
+              <a:t>・受験者2は全体的に高く、上位5名を選ぶ際の中心候補になる。</a:t>
             </a:r>
           </a:p>
           <a:p xmlns:a="http://schemas.openxmlformats.org/drawingml/2006/main">
@@ -3531,7 +3531,7 @@
                   <a:srgbClr val="1C2A32"/>
                 </a:solidFill>
               </a:rPr>
-              <a:t>・対人評価や英語を重視する職種では受験者4、次いで受験者3を検討できる。</a:t>
+              <a:t>・受験者1は専門・論文型、受験者4と3は英語・面接型として配属先を分けて考える。</a:t>
             </a:r>
           </a:p>
           <a:p xmlns:a="http://schemas.openxmlformats.org/drawingml/2006/main">
@@ -3548,7 +3548,7 @@
                   <a:srgbClr val="1C2A32"/>
                 </a:solidFill>
               </a:rPr>
-              <a:t>・受験者5は全体的な基礎力不足が大きく、採用優先度は低い。</a:t>
+              <a:t>・受験者5は上位5名に入れる場合も、入社後の基礎力補強が必要である。</a:t>
             </a:r>
           </a:p>
         </p:txBody>
@@ -4264,7 +4264,7 @@
           <p:cNvPr id="6" name="">
             <a:extLst xmlns:a="http://schemas.openxmlformats.org/drawingml/2006/main">
               <a:ext uri="{FF2B5EF4-FFF2-40B4-BE49-F238E27FC236}">
-                <a16:creationId xmlns:a16="http://schemas.microsoft.com/office/drawing/2014/main" id="{72BBC045-2FB4-405C-A31A-E2F7FBBAAEA8}"/>
+                <a16:creationId xmlns:a16="http://schemas.microsoft.com/office/drawing/2014/main" id="{38443262-EB67-4895-B60B-76852C6AAE1A}"/>
               </a:ext>
             </a:extLst>
           </p:cNvPr>
@@ -4312,7 +4312,7 @@
     </p:spTree>
     <p:extLst>
       <p:ext uri="{BB962C8B-B14F-4D97-AF65-F5344CB8AC3E}">
-        <p14:creationId xmlns:p14="http://schemas.microsoft.com/office/powerpoint/2010/main" val="305175789"/>
+        <p14:creationId xmlns:p14="http://schemas.microsoft.com/office/powerpoint/2010/main" val="439524359"/>
       </p:ext>
     </p:extLst>
   </p:cSld>
